--- a/docs/quickguides/pptx/23_Quick_Guide_oneSCM_FAQ_Troubleshooting_und_Support.pptx
+++ b/docs/quickguides/pptx/23_Quick_Guide_oneSCM_FAQ_Troubleshooting_und_Support.pptx
@@ -1213,11 +1213,11 @@
         <p:spPr>
           <a:xfrm>
             <a:off x="201168" y="713232"/>
-            <a:ext cx="4663440" cy="1472184"/>
+            <a:ext cx="4663440" cy="1581912"/>
           </a:xfrm>
           <a:prstGeom prst="roundRect">
             <a:avLst>
-              <a:gd name="adj" fmla="val 6211"/>
+              <a:gd name="adj" fmla="val 5780"/>
             </a:avLst>
           </a:prstGeom>
           <a:solidFill>
@@ -1281,7 +1281,7 @@
         <p:spPr>
           <a:xfrm>
             <a:off x="310896" y="1060704"/>
-            <a:ext cx="2633472" cy="1069848"/>
+            <a:ext cx="2633472" cy="1179576"/>
           </a:xfrm>
           <a:prstGeom prst="rect">
             <a:avLst/>
@@ -1446,12 +1446,20 @@
           </a:p>
         </p:txBody>
       </p:sp>
-      <p:sp>
-        <p:nvSpPr>
-          <p:cNvPr id="11" name="Screenshot-Rahmen"/>
-          <p:cNvSpPr/>
-          <p:nvPr/>
-        </p:nvSpPr>
+      <p:pic>
+        <p:nvPicPr>
+          <p:cNvPr id="11" name="Kapitelbild" descr="/tmp/claude-0/-home-user-step2-oneSCM/768b354c-b2c6-524c-b102-2abaf010b0fe/scratchpad/qg/src/img/badge_23.png">    </p:cNvPr>
+          <p:cNvPicPr>
+            <a:picLocks noChangeAspect="1"/>
+          </p:cNvPicPr>
+          <p:nvPr/>
+        </p:nvPicPr>
+        <p:blipFill>
+          <a:blip r:embed="rId3"/>
+          <a:stretch>
+            <a:fillRect/>
+          </a:stretch>
+        </p:blipFill>
         <p:spPr>
           <a:xfrm>
             <a:off x="3035808" y="804672"/>
@@ -1460,82 +1468,17 @@
           <a:prstGeom prst="rect">
             <a:avLst/>
           </a:prstGeom>
-          <a:solidFill>
-            <a:srgbClr val="F3F3F3"/>
-          </a:solidFill>
-          <a:ln w="6350">
-            <a:solidFill>
-              <a:srgbClr val="BFBFBF"/>
-            </a:solidFill>
-            <a:prstDash val="solid"/>
-          </a:ln>
-        </p:spPr>
-      </p:sp>
-      <p:sp>
-        <p:nvSpPr>
-          <p:cNvPr id="12" name="Screenshot-Beschriftung"/>
+        </p:spPr>
+      </p:pic>
+      <p:sp>
+        <p:nvSpPr>
+          <p:cNvPr id="12" name="Hinweis"/>
           <p:cNvSpPr txBox="1"/>
           <p:nvPr/>
         </p:nvSpPr>
         <p:spPr>
           <a:xfrm>
-            <a:off x="3035808" y="804672"/>
-            <a:ext cx="1737360" cy="1051560"/>
-          </a:xfrm>
-          <a:prstGeom prst="rect">
-            <a:avLst/>
-          </a:prstGeom>
-          <a:noFill/>
-          <a:ln/>
-        </p:spPr>
-        <p:txBody>
-          <a:bodyPr wrap="square" lIns="50800" tIns="50800" rIns="50800" bIns="50800" rtlCol="0" anchor="ctr"/>
-          <a:lstStyle/>
-          <a:p>
-            <a:pPr algn="ctr" indent="0" marL="0">
-              <a:buNone/>
-            </a:pPr>
-            <a:r>
-              <a:rPr lang="en-US" sz="700" b="1" dirty="0">
-                <a:solidFill>
-                  <a:srgbClr val="404040"/>
-                </a:solidFill>
-                <a:latin typeface="MB Corpo S Text Office" pitchFamily="34" charset="0"/>
-                <a:ea typeface="MB Corpo S Text Office" pitchFamily="34" charset="-122"/>
-                <a:cs typeface="MB Corpo S Text Office" pitchFamily="34" charset="-120"/>
-              </a:rPr>
-              <a:t>Screenshot</a:t>
-            </a:r>
-            <a:endParaRPr lang="en-US" sz="700" dirty="0"/>
-          </a:p>
-          <a:p>
-            <a:pPr algn="ctr" indent="0" marL="0">
-              <a:buNone/>
-            </a:pPr>
-            <a:r>
-              <a:rPr lang="en-US" sz="700" dirty="0">
-                <a:solidFill>
-                  <a:srgbClr val="404040"/>
-                </a:solidFill>
-                <a:latin typeface="MB Corpo S Text Office" pitchFamily="34" charset="0"/>
-                <a:ea typeface="MB Corpo S Text Office" pitchFamily="34" charset="-122"/>
-                <a:cs typeface="MB Corpo S Text Office" pitchFamily="34" charset="-120"/>
-              </a:rPr>
-              <a:t>FAQ-Übersicht</a:t>
-            </a:r>
-            <a:endParaRPr lang="en-US" sz="700" dirty="0"/>
-          </a:p>
-        </p:txBody>
-      </p:sp>
-      <p:sp>
-        <p:nvSpPr>
-          <p:cNvPr id="13" name="Hinweis"/>
-          <p:cNvSpPr txBox="1"/>
-          <p:nvPr/>
-        </p:nvSpPr>
-        <p:spPr>
-          <a:xfrm>
-            <a:off x="201168" y="2295144"/>
+            <a:off x="201168" y="2404872"/>
             <a:ext cx="4663440" cy="329184"/>
           </a:xfrm>
           <a:prstGeom prst="rect">
@@ -1568,13 +1511,13 @@
       </p:sp>
       <p:sp>
         <p:nvSpPr>
-          <p:cNvPr id="14" name="Überblick Titel"/>
+          <p:cNvPr id="13" name="Überblick Titel"/>
           <p:cNvSpPr txBox="1"/>
           <p:nvPr/>
         </p:nvSpPr>
         <p:spPr>
           <a:xfrm>
-            <a:off x="201168" y="2734056"/>
+            <a:off x="201168" y="2843784"/>
             <a:ext cx="4663440" cy="256032"/>
           </a:xfrm>
           <a:prstGeom prst="rect">
@@ -1607,13 +1550,13 @@
       </p:sp>
       <p:sp>
         <p:nvSpPr>
-          <p:cNvPr id="15" name="Überblick Spalte"/>
+          <p:cNvPr id="14" name="Überblick Spalte"/>
           <p:cNvSpPr txBox="1"/>
           <p:nvPr/>
         </p:nvSpPr>
         <p:spPr>
           <a:xfrm>
-            <a:off x="201168" y="3008376"/>
+            <a:off x="201168" y="3118104"/>
             <a:ext cx="2240280" cy="1307592"/>
           </a:xfrm>
           <a:prstGeom prst="rect">
@@ -1712,13 +1655,13 @@
       </p:sp>
       <p:sp>
         <p:nvSpPr>
-          <p:cNvPr id="16" name="Überblick Spalte"/>
+          <p:cNvPr id="15" name="Überblick Spalte"/>
           <p:cNvSpPr txBox="1"/>
           <p:nvPr/>
         </p:nvSpPr>
         <p:spPr>
           <a:xfrm>
-            <a:off x="2624328" y="3008376"/>
+            <a:off x="2624328" y="3118104"/>
             <a:ext cx="2240280" cy="1307592"/>
           </a:xfrm>
           <a:prstGeom prst="rect">
@@ -1815,16 +1758,64 @@
           </a:p>
         </p:txBody>
       </p:sp>
-      <p:sp>
-        <p:nvSpPr>
-          <p:cNvPr id="17" name="Abschnittstitel"/>
+      <p:pic>
+        <p:nvPicPr>
+          <p:cNvPr id="16" name="Prozessbild" descr="/tmp/claude-0/-home-user-step2-oneSCM/768b354c-b2c6-524c-b102-2abaf010b0fe/scratchpad/qg/src/img/landscape_23.png">    </p:cNvPr>
+          <p:cNvPicPr>
+            <a:picLocks noChangeAspect="1"/>
+          </p:cNvPicPr>
+          <p:nvPr/>
+        </p:nvPicPr>
+        <p:blipFill>
+          <a:blip r:embed="rId4"/>
+          <a:stretch>
+            <a:fillRect/>
+          </a:stretch>
+        </p:blipFill>
+        <p:spPr>
+          <a:xfrm>
+            <a:off x="201168" y="4535424"/>
+            <a:ext cx="4663440" cy="1207008"/>
+          </a:xfrm>
+          <a:prstGeom prst="rect">
+            <a:avLst/>
+          </a:prstGeom>
+        </p:spPr>
+      </p:pic>
+      <p:pic>
+        <p:nvPicPr>
+          <p:cNvPr id="17" name="Prozessbild" descr="/tmp/claude-0/-home-user-step2-oneSCM/768b354c-b2c6-524c-b102-2abaf010b0fe/scratchpad/qg/src/img/flow_23.png">    </p:cNvPr>
+          <p:cNvPicPr>
+            <a:picLocks noChangeAspect="1"/>
+          </p:cNvPicPr>
+          <p:nvPr/>
+        </p:nvPicPr>
+        <p:blipFill>
+          <a:blip r:embed="rId5"/>
+          <a:stretch>
+            <a:fillRect/>
+          </a:stretch>
+        </p:blipFill>
+        <p:spPr>
+          <a:xfrm>
+            <a:off x="5047488" y="713232"/>
+            <a:ext cx="4663440" cy="960120"/>
+          </a:xfrm>
+          <a:prstGeom prst="rect">
+            <a:avLst/>
+          </a:prstGeom>
+        </p:spPr>
+      </p:pic>
+      <p:sp>
+        <p:nvSpPr>
+          <p:cNvPr id="18" name="Abschnittstitel"/>
           <p:cNvSpPr txBox="1"/>
           <p:nvPr/>
         </p:nvSpPr>
         <p:spPr>
           <a:xfrm>
-            <a:off x="5047488" y="713232"/>
-            <a:ext cx="2816352" cy="256032"/>
+            <a:off x="5047488" y="1783080"/>
+            <a:ext cx="4663440" cy="256032"/>
           </a:xfrm>
           <a:prstGeom prst="rect">
             <a:avLst/>
@@ -1856,14 +1847,14 @@
       </p:sp>
       <p:sp>
         <p:nvSpPr>
-          <p:cNvPr id="18" name="Schritte"/>
+          <p:cNvPr id="19" name="Schritte"/>
           <p:cNvSpPr txBox="1"/>
           <p:nvPr/>
         </p:nvSpPr>
         <p:spPr>
           <a:xfrm>
-            <a:off x="5065776" y="987552"/>
-            <a:ext cx="2798064" cy="2313432"/>
+            <a:off x="5065776" y="2057400"/>
+            <a:ext cx="4645152" cy="1627632"/>
           </a:xfrm>
           <a:prstGeom prst="rect">
             <a:avLst/>
@@ -2148,94 +2139,13 @@
       </p:sp>
       <p:sp>
         <p:nvSpPr>
-          <p:cNvPr id="19" name="Screenshot-Rahmen"/>
+          <p:cNvPr id="20" name="Warnhinweis"/>
           <p:cNvSpPr/>
           <p:nvPr/>
         </p:nvSpPr>
         <p:spPr>
           <a:xfrm>
-            <a:off x="7973568" y="987552"/>
-            <a:ext cx="1737360" cy="1463040"/>
-          </a:xfrm>
-          <a:prstGeom prst="rect">
-            <a:avLst/>
-          </a:prstGeom>
-          <a:solidFill>
-            <a:srgbClr val="F3F3F3"/>
-          </a:solidFill>
-          <a:ln w="6350">
-            <a:solidFill>
-              <a:srgbClr val="BFBFBF"/>
-            </a:solidFill>
-            <a:prstDash val="solid"/>
-          </a:ln>
-        </p:spPr>
-      </p:sp>
-      <p:sp>
-        <p:nvSpPr>
-          <p:cNvPr id="20" name="Screenshot-Beschriftung"/>
-          <p:cNvSpPr txBox="1"/>
-          <p:nvPr/>
-        </p:nvSpPr>
-        <p:spPr>
-          <a:xfrm>
-            <a:off x="7973568" y="987552"/>
-            <a:ext cx="1737360" cy="1463040"/>
-          </a:xfrm>
-          <a:prstGeom prst="rect">
-            <a:avLst/>
-          </a:prstGeom>
-          <a:noFill/>
-          <a:ln/>
-        </p:spPr>
-        <p:txBody>
-          <a:bodyPr wrap="square" lIns="50800" tIns="50800" rIns="50800" bIns="50800" rtlCol="0" anchor="ctr"/>
-          <a:lstStyle/>
-          <a:p>
-            <a:pPr algn="ctr" indent="0" marL="0">
-              <a:buNone/>
-            </a:pPr>
-            <a:r>
-              <a:rPr lang="en-US" sz="700" b="1" dirty="0">
-                <a:solidFill>
-                  <a:srgbClr val="404040"/>
-                </a:solidFill>
-                <a:latin typeface="MB Corpo S Text Office" pitchFamily="34" charset="0"/>
-                <a:ea typeface="MB Corpo S Text Office" pitchFamily="34" charset="-122"/>
-                <a:cs typeface="MB Corpo S Text Office" pitchFamily="34" charset="-120"/>
-              </a:rPr>
-              <a:t>Screenshot</a:t>
-            </a:r>
-            <a:endParaRPr lang="en-US" sz="700" dirty="0"/>
-          </a:p>
-          <a:p>
-            <a:pPr algn="ctr" indent="0" marL="0">
-              <a:buNone/>
-            </a:pPr>
-            <a:r>
-              <a:rPr lang="en-US" sz="700" dirty="0">
-                <a:solidFill>
-                  <a:srgbClr val="404040"/>
-                </a:solidFill>
-                <a:latin typeface="MB Corpo S Text Office" pitchFamily="34" charset="0"/>
-                <a:ea typeface="MB Corpo S Text Office" pitchFamily="34" charset="-122"/>
-                <a:cs typeface="MB Corpo S Text Office" pitchFamily="34" charset="-120"/>
-              </a:rPr>
-              <a:t>Supportfall anlegen</a:t>
-            </a:r>
-            <a:endParaRPr lang="en-US" sz="700" dirty="0"/>
-          </a:p>
-        </p:txBody>
-      </p:sp>
-      <p:sp>
-        <p:nvSpPr>
-          <p:cNvPr id="21" name="Warnhinweis"/>
-          <p:cNvSpPr/>
-          <p:nvPr/>
-        </p:nvSpPr>
-        <p:spPr>
-          <a:xfrm>
-            <a:off x="5047488" y="3410712"/>
+            <a:off x="5047488" y="3794760"/>
             <a:ext cx="4663440" cy="475488"/>
           </a:xfrm>
           <a:prstGeom prst="roundRect">
@@ -2256,13 +2166,13 @@
       </p:sp>
       <p:sp>
         <p:nvSpPr>
-          <p:cNvPr id="22" name="Warnzeichen"/>
+          <p:cNvPr id="21" name="Warnzeichen"/>
           <p:cNvSpPr txBox="1"/>
           <p:nvPr/>
         </p:nvSpPr>
         <p:spPr>
           <a:xfrm>
-            <a:off x="5120640" y="3410712"/>
+            <a:off x="5120640" y="3794760"/>
             <a:ext cx="274320" cy="475488"/>
           </a:xfrm>
           <a:prstGeom prst="rect">
@@ -2295,13 +2205,13 @@
       </p:sp>
       <p:sp>
         <p:nvSpPr>
-          <p:cNvPr id="23" name="Warntext"/>
+          <p:cNvPr id="22" name="Warntext"/>
           <p:cNvSpPr txBox="1"/>
           <p:nvPr/>
         </p:nvSpPr>
         <p:spPr>
           <a:xfrm>
-            <a:off x="5458968" y="3410712"/>
+            <a:off x="5458968" y="3794760"/>
             <a:ext cx="4160520" cy="475488"/>
           </a:xfrm>
           <a:prstGeom prst="rect">
@@ -2345,14 +2255,14 @@
       </p:sp>
       <p:sp>
         <p:nvSpPr>
-          <p:cNvPr id="24" name="Schritte"/>
+          <p:cNvPr id="23" name="Schritte"/>
           <p:cNvSpPr txBox="1"/>
           <p:nvPr/>
         </p:nvSpPr>
         <p:spPr>
           <a:xfrm>
-            <a:off x="5065776" y="3995928"/>
-            <a:ext cx="4645152" cy="694944"/>
+            <a:off x="5065776" y="4379976"/>
+            <a:ext cx="4645152" cy="557784"/>
           </a:xfrm>
           <a:prstGeom prst="rect">
             <a:avLst/>
@@ -2778,11 +2688,11 @@
         <p:spPr>
           <a:xfrm>
             <a:off x="201168" y="713232"/>
-            <a:ext cx="4663440" cy="1965960"/>
+            <a:ext cx="4663440" cy="2112264"/>
           </a:xfrm>
           <a:prstGeom prst="roundRect">
             <a:avLst>
-              <a:gd name="adj" fmla="val 4651"/>
+              <a:gd name="adj" fmla="val 4329"/>
             </a:avLst>
           </a:prstGeom>
           <a:solidFill>
@@ -2846,7 +2756,7 @@
         <p:spPr>
           <a:xfrm>
             <a:off x="310896" y="1060704"/>
-            <a:ext cx="4480560" cy="1563624"/>
+            <a:ext cx="4480560" cy="1709928"/>
           </a:xfrm>
           <a:prstGeom prst="rect">
             <a:avLst/>
@@ -3086,12 +2996,12 @@
         </p:nvSpPr>
         <p:spPr>
           <a:xfrm>
-            <a:off x="201168" y="2788920"/>
-            <a:ext cx="4663440" cy="1115568"/>
+            <a:off x="201168" y="2935224"/>
+            <a:ext cx="4663440" cy="1197864"/>
           </a:xfrm>
           <a:prstGeom prst="roundRect">
             <a:avLst>
-              <a:gd name="adj" fmla="val 8197"/>
+              <a:gd name="adj" fmla="val 7634"/>
             </a:avLst>
           </a:prstGeom>
           <a:solidFill>
@@ -3115,7 +3025,7 @@
         </p:nvSpPr>
         <p:spPr>
           <a:xfrm>
-            <a:off x="310896" y="2862072"/>
+            <a:off x="310896" y="3008376"/>
             <a:ext cx="4480560" cy="256032"/>
           </a:xfrm>
           <a:prstGeom prst="rect">
@@ -3154,8 +3064,8 @@
         </p:nvSpPr>
         <p:spPr>
           <a:xfrm>
-            <a:off x="310896" y="3136392"/>
-            <a:ext cx="4480560" cy="713232"/>
+            <a:off x="310896" y="3282696"/>
+            <a:ext cx="4480560" cy="795528"/>
           </a:xfrm>
           <a:prstGeom prst="rect">
             <a:avLst/>
@@ -3260,12 +3170,12 @@
         </p:nvSpPr>
         <p:spPr>
           <a:xfrm>
-            <a:off x="201168" y="4014216"/>
-            <a:ext cx="4663440" cy="1225296"/>
+            <a:off x="201168" y="4242816"/>
+            <a:ext cx="4663440" cy="1170432"/>
           </a:xfrm>
           <a:prstGeom prst="roundRect">
             <a:avLst>
-              <a:gd name="adj" fmla="val 7463"/>
+              <a:gd name="adj" fmla="val 7813"/>
             </a:avLst>
           </a:prstGeom>
           <a:solidFill>
@@ -3289,7 +3199,7 @@
         </p:nvSpPr>
         <p:spPr>
           <a:xfrm>
-            <a:off x="310896" y="4087368"/>
+            <a:off x="310896" y="4315968"/>
             <a:ext cx="4480560" cy="256032"/>
           </a:xfrm>
           <a:prstGeom prst="rect">
@@ -3328,8 +3238,8 @@
         </p:nvSpPr>
         <p:spPr>
           <a:xfrm>
-            <a:off x="310896" y="4361688"/>
-            <a:ext cx="4480560" cy="822960"/>
+            <a:off x="310896" y="4590288"/>
+            <a:ext cx="4480560" cy="768096"/>
           </a:xfrm>
           <a:prstGeom prst="rect">
             <a:avLst/>
@@ -3414,11 +3324,11 @@
         <p:spPr>
           <a:xfrm>
             <a:off x="5047488" y="713232"/>
-            <a:ext cx="4663440" cy="1810512"/>
+            <a:ext cx="4663440" cy="1673352"/>
           </a:xfrm>
           <a:prstGeom prst="roundRect">
             <a:avLst>
-              <a:gd name="adj" fmla="val 5051"/>
+              <a:gd name="adj" fmla="val 5464"/>
             </a:avLst>
           </a:prstGeom>
           <a:solidFill>
@@ -3443,7 +3353,7 @@
         <p:spPr>
           <a:xfrm>
             <a:off x="5157216" y="786384"/>
-            <a:ext cx="4443984" cy="1682496"/>
+            <a:ext cx="4443984" cy="1545336"/>
           </a:xfrm>
           <a:prstGeom prst="rect">
             <a:avLst/>
@@ -3580,12 +3490,12 @@
         </p:nvSpPr>
         <p:spPr>
           <a:xfrm>
-            <a:off x="5047488" y="2633472"/>
-            <a:ext cx="4663440" cy="1252728"/>
+            <a:off x="5047488" y="2496312"/>
+            <a:ext cx="4663440" cy="1344168"/>
           </a:xfrm>
           <a:prstGeom prst="roundRect">
             <a:avLst>
-              <a:gd name="adj" fmla="val 7299"/>
+              <a:gd name="adj" fmla="val 6803"/>
             </a:avLst>
           </a:prstGeom>
           <a:solidFill>
@@ -3609,7 +3519,7 @@
         </p:nvSpPr>
         <p:spPr>
           <a:xfrm>
-            <a:off x="5157216" y="2706624"/>
+            <a:off x="5157216" y="2569464"/>
             <a:ext cx="4480560" cy="256032"/>
           </a:xfrm>
           <a:prstGeom prst="rect">
@@ -3648,8 +3558,8 @@
         </p:nvSpPr>
         <p:spPr>
           <a:xfrm>
-            <a:off x="5157216" y="2980944"/>
-            <a:ext cx="4480560" cy="850392"/>
+            <a:off x="5157216" y="2843784"/>
+            <a:ext cx="4480560" cy="941832"/>
           </a:xfrm>
           <a:prstGeom prst="rect">
             <a:avLst/>

--- a/docs/quickguides/pptx/23_Quick_Guide_oneSCM_FAQ_Troubleshooting_und_Support.pptx
+++ b/docs/quickguides/pptx/23_Quick_Guide_oneSCM_FAQ_Troubleshooting_und_Support.pptx
@@ -1159,7 +1159,7 @@
                 <a:ea typeface="MB Corpo S Text Office" pitchFamily="34" charset="-122"/>
                 <a:cs typeface="MB Corpo S Text Office" pitchFamily="34" charset="-120"/>
               </a:rPr>
-              <a:t>: Dieser Quick Guide fasst Kapitel 23 des oneSCM-Handbuchs zusammen. Details, Bildschirmbilder und Nachweise finden Sie im Handbuchkapitel.</a:t>
+              <a:t>: Dieser Quick Guide fasst Kapitel 23 des oneSCM-Handbuchs zusammen. Details, Bildschirmbilder und Nachweise finden Sie im Handbuch.</a:t>
             </a:r>
             <a:endParaRPr lang="en-US" sz="800" dirty="0"/>
           </a:p>
@@ -2634,7 +2634,7 @@
                 <a:ea typeface="MB Corpo S Text Office" pitchFamily="34" charset="-122"/>
                 <a:cs typeface="MB Corpo S Text Office" pitchFamily="34" charset="-120"/>
               </a:rPr>
-              <a:t>: Dieser Quick Guide fasst Kapitel 23 des oneSCM-Handbuchs zusammen. Details, Bildschirmbilder und Nachweise finden Sie im Handbuchkapitel.</a:t>
+              <a:t>: Dieser Quick Guide fasst Kapitel 23 des oneSCM-Handbuchs zusammen. Details, Bildschirmbilder und Nachweise finden Sie im Handbuch.</a:t>
             </a:r>
             <a:endParaRPr lang="en-US" sz="800" dirty="0"/>
           </a:p>

--- a/docs/quickguides/pptx/23_Quick_Guide_oneSCM_FAQ_Troubleshooting_und_Support.pptx
+++ b/docs/quickguides/pptx/23_Quick_Guide_oneSCM_FAQ_Troubleshooting_und_Support.pptx
@@ -1503,7 +1503,7 @@
                 <a:ea typeface="MB Corpo S Text Office" pitchFamily="34" charset="-122"/>
                 <a:cs typeface="MB Corpo S Text Office" pitchFamily="34" charset="-120"/>
               </a:rPr>
-              <a:t>Dieses Dokument ist interaktiv – Verweise auf Handbuchkapitel und Systeme sind als Links hinterlegt.</a:t>
+              <a:t>Verweise auf Handbuchkapitel und Systeme sind hervorgehoben; E-Mail-Adressen sind als Links hinterlegt.</a:t>
             </a:r>
             <a:endParaRPr lang="en-US" sz="900" dirty="0"/>
           </a:p>
@@ -3171,11 +3171,11 @@
         <p:spPr>
           <a:xfrm>
             <a:off x="201168" y="4242816"/>
-            <a:ext cx="4663440" cy="1170432"/>
+            <a:ext cx="4663440" cy="1316736"/>
           </a:xfrm>
           <a:prstGeom prst="roundRect">
             <a:avLst>
-              <a:gd name="adj" fmla="val 7813"/>
+              <a:gd name="adj" fmla="val 6944"/>
             </a:avLst>
           </a:prstGeom>
           <a:solidFill>
@@ -3239,7 +3239,7 @@
         <p:spPr>
           <a:xfrm>
             <a:off x="310896" y="4590288"/>
-            <a:ext cx="4480560" cy="768096"/>
+            <a:ext cx="4480560" cy="914400"/>
           </a:xfrm>
           <a:prstGeom prst="rect">
             <a:avLst/>
@@ -3288,7 +3288,7 @@
                 <a:ea typeface="MB Corpo S Text Office" pitchFamily="34" charset="-122"/>
                 <a:cs typeface="MB Corpo S Text Office" pitchFamily="34" charset="-120"/>
               </a:rPr>
-              <a:t>Ticketreferenzen helfen, Ihr Anliegen dem richtigen Kapitel zuzuordnen (Anhang E).</a:t>
+              <a:t>Bei der Vertragserstellung für MBIL kann die Produktabfrage mit einem Serverfehler enden; wiederholen Sie die Abfrage und melden Sie den Fall (23.2).</a:t>
             </a:r>
             <a:endParaRPr lang="en-US" sz="900" dirty="0"/>
           </a:p>
@@ -3608,6 +3608,13 @@
                 <a:latin typeface="MB Corpo S Text Office" pitchFamily="34" charset="0"/>
                 <a:ea typeface="MB Corpo S Text Office" pitchFamily="34" charset="-122"/>
                 <a:cs typeface="MB Corpo S Text Office" pitchFamily="34" charset="-120"/>
+                <a:hlinkClick r:id="rId3" invalidUrl="" action="" tgtFrame="" tooltip="sc-van@mercedes-benz.com" history="1" highlightClick="0" endSnd="0">
+                  <a:extLst>
+                    <a:ext uri="{A12FA001-AC4F-418D-AE19-62706E023703}">
+                      <ahyp:hlinkClr xmlns:ahyp="http://schemas.microsoft.com/office/drawing/2018/hyperlinkcolor" val="tx"/>
+                    </a:ext>
+                  </a:extLst>
+                </a:hlinkClick>
               </a:rPr>
               <a:t>sc-van@mercedes-benz.com</a:t>
             </a:r>
